--- a/Mission5_ภาพรวมกลุ่ม.pptx
+++ b/Mission5_ภาพรวมกลุ่ม.pptx
@@ -5472,6 +5472,72 @@
         </p:nvSpPr>
         <p:spPr>
           <a:xfrm>
+            <a:off x="8162544" y="6185408"/>
+            <a:ext cx="1086104" cy="489712"/>
+          </a:xfrm>
+          <a:prstGeom prst="roundRect">
+            <a:avLst>
+              <a:gd name="adj" fmla="val 7469"/>
+            </a:avLst>
+          </a:prstGeom>
+          <a:solidFill>
+            <a:srgbClr val="FFFFFF"/>
+          </a:solidFill>
+          <a:ln w="15875">
+            <a:solidFill>
+              <a:srgbClr val="F15A24"/>
+            </a:solidFill>
+            <a:prstDash val="solid"/>
+          </a:ln>
+        </p:spPr>
+      </p:sp>
+      <p:sp>
+        <p:nvSpPr>
+          <p:cNvPr id="147" name="Text 145"/>
+          <p:cNvSpPr/>
+          <p:nvPr/>
+        </p:nvSpPr>
+        <p:spPr>
+          <a:xfrm>
+            <a:off x="8162544" y="6185408"/>
+            <a:ext cx="1086104" cy="489712"/>
+          </a:xfrm>
+          <a:prstGeom prst="rect">
+            <a:avLst/>
+          </a:prstGeom>
+          <a:noFill/>
+          <a:ln/>
+        </p:spPr>
+        <p:txBody>
+          <a:bodyPr wrap="square" lIns="0" tIns="0" rIns="0" bIns="0" rtlCol="0" anchor="ctr"/>
+          <a:lstStyle/>
+          <a:p>
+            <a:pPr algn="ctr" indent="0" marL="0">
+              <a:buNone/>
+            </a:pPr>
+            <a:r>
+              <a:rPr lang="en-US" sz="1900" b="1" dirty="0">
+                <a:solidFill>
+                  <a:srgbClr val="005587"/>
+                </a:solidFill>
+                <a:latin typeface="Arial" pitchFamily="34" charset="0"/>
+                <a:ea typeface="Arial" pitchFamily="34" charset="-122"/>
+                <a:cs typeface="Arial" pitchFamily="34" charset="-120"/>
+              </a:rPr>
+              <a:t>098</a:t>
+            </a:r>
+            <a:endParaRPr lang="en-US" sz="1900" dirty="0"/>
+          </a:p>
+        </p:txBody>
+      </p:sp>
+      <p:sp>
+        <p:nvSpPr>
+          <p:cNvPr id="148" name="Shape 146"/>
+          <p:cNvSpPr/>
+          <p:nvPr/>
+        </p:nvSpPr>
+        <p:spPr>
+          <a:xfrm>
             <a:off x="9413240" y="1234440"/>
             <a:ext cx="1195832" cy="5440680"/>
           </a:xfrm>
@@ -5493,7 +5559,7 @@
       </p:sp>
       <p:sp>
         <p:nvSpPr>
-          <p:cNvPr id="147" name="Shape 145"/>
+          <p:cNvPr id="149" name="Shape 147"/>
           <p:cNvSpPr/>
           <p:nvPr/>
         </p:nvSpPr>
@@ -5515,7 +5581,7 @@
       </p:sp>
       <p:sp>
         <p:nvSpPr>
-          <p:cNvPr id="148" name="Shape 146"/>
+          <p:cNvPr id="150" name="Shape 148"/>
           <p:cNvSpPr/>
           <p:nvPr/>
         </p:nvSpPr>
@@ -5535,7 +5601,7 @@
       </p:sp>
       <p:sp>
         <p:nvSpPr>
-          <p:cNvPr id="149" name="Text 147"/>
+          <p:cNvPr id="151" name="Text 149"/>
           <p:cNvSpPr/>
           <p:nvPr/>
         </p:nvSpPr>
@@ -5574,7 +5640,7 @@
       </p:sp>
       <p:sp>
         <p:nvSpPr>
-          <p:cNvPr id="150" name="Shape 148"/>
+          <p:cNvPr id="152" name="Shape 150"/>
           <p:cNvSpPr/>
           <p:nvPr/>
         </p:nvSpPr>
@@ -5601,7 +5667,7 @@
       </p:sp>
       <p:sp>
         <p:nvSpPr>
-          <p:cNvPr id="151" name="Text 149"/>
+          <p:cNvPr id="153" name="Text 151"/>
           <p:cNvSpPr/>
           <p:nvPr/>
         </p:nvSpPr>
@@ -5640,7 +5706,7 @@
       </p:sp>
       <p:sp>
         <p:nvSpPr>
-          <p:cNvPr id="152" name="Shape 150"/>
+          <p:cNvPr id="154" name="Shape 152"/>
           <p:cNvSpPr/>
           <p:nvPr/>
         </p:nvSpPr>
@@ -5667,7 +5733,7 @@
       </p:sp>
       <p:sp>
         <p:nvSpPr>
-          <p:cNvPr id="153" name="Text 151"/>
+          <p:cNvPr id="155" name="Text 153"/>
           <p:cNvSpPr/>
           <p:nvPr/>
         </p:nvSpPr>
@@ -5706,7 +5772,7 @@
       </p:sp>
       <p:sp>
         <p:nvSpPr>
-          <p:cNvPr id="154" name="Shape 152"/>
+          <p:cNvPr id="156" name="Shape 154"/>
           <p:cNvSpPr/>
           <p:nvPr/>
         </p:nvSpPr>
@@ -5733,7 +5799,7 @@
       </p:sp>
       <p:sp>
         <p:nvSpPr>
-          <p:cNvPr id="155" name="Text 153"/>
+          <p:cNvPr id="157" name="Text 155"/>
           <p:cNvSpPr/>
           <p:nvPr/>
         </p:nvSpPr>
@@ -5772,7 +5838,7 @@
       </p:sp>
       <p:sp>
         <p:nvSpPr>
-          <p:cNvPr id="156" name="Shape 154"/>
+          <p:cNvPr id="158" name="Shape 156"/>
           <p:cNvSpPr/>
           <p:nvPr/>
         </p:nvSpPr>
@@ -5799,7 +5865,7 @@
       </p:sp>
       <p:sp>
         <p:nvSpPr>
-          <p:cNvPr id="157" name="Text 155"/>
+          <p:cNvPr id="159" name="Text 157"/>
           <p:cNvSpPr/>
           <p:nvPr/>
         </p:nvSpPr>
@@ -5838,7 +5904,7 @@
       </p:sp>
       <p:sp>
         <p:nvSpPr>
-          <p:cNvPr id="158" name="Shape 156"/>
+          <p:cNvPr id="160" name="Shape 158"/>
           <p:cNvSpPr/>
           <p:nvPr/>
         </p:nvSpPr>
@@ -5865,7 +5931,7 @@
       </p:sp>
       <p:sp>
         <p:nvSpPr>
-          <p:cNvPr id="159" name="Text 157"/>
+          <p:cNvPr id="161" name="Text 159"/>
           <p:cNvSpPr/>
           <p:nvPr/>
         </p:nvSpPr>
@@ -5904,7 +5970,7 @@
       </p:sp>
       <p:sp>
         <p:nvSpPr>
-          <p:cNvPr id="160" name="Shape 158"/>
+          <p:cNvPr id="162" name="Shape 160"/>
           <p:cNvSpPr/>
           <p:nvPr/>
         </p:nvSpPr>
@@ -5931,7 +5997,7 @@
       </p:sp>
       <p:sp>
         <p:nvSpPr>
-          <p:cNvPr id="161" name="Text 159"/>
+          <p:cNvPr id="163" name="Text 161"/>
           <p:cNvSpPr/>
           <p:nvPr/>
         </p:nvSpPr>
@@ -5970,7 +6036,7 @@
       </p:sp>
       <p:sp>
         <p:nvSpPr>
-          <p:cNvPr id="162" name="Shape 160"/>
+          <p:cNvPr id="164" name="Shape 162"/>
           <p:cNvSpPr/>
           <p:nvPr/>
         </p:nvSpPr>
@@ -5997,7 +6063,7 @@
       </p:sp>
       <p:sp>
         <p:nvSpPr>
-          <p:cNvPr id="163" name="Text 161"/>
+          <p:cNvPr id="165" name="Text 163"/>
           <p:cNvSpPr/>
           <p:nvPr/>
         </p:nvSpPr>
@@ -6036,7 +6102,7 @@
       </p:sp>
       <p:sp>
         <p:nvSpPr>
-          <p:cNvPr id="164" name="Shape 162"/>
+          <p:cNvPr id="166" name="Shape 164"/>
           <p:cNvSpPr/>
           <p:nvPr/>
         </p:nvSpPr>
@@ -6063,7 +6129,7 @@
       </p:sp>
       <p:sp>
         <p:nvSpPr>
-          <p:cNvPr id="165" name="Text 163"/>
+          <p:cNvPr id="167" name="Text 165"/>
           <p:cNvSpPr/>
           <p:nvPr/>
         </p:nvSpPr>
@@ -6102,7 +6168,7 @@
       </p:sp>
       <p:sp>
         <p:nvSpPr>
-          <p:cNvPr id="166" name="Shape 164"/>
+          <p:cNvPr id="168" name="Shape 166"/>
           <p:cNvSpPr/>
           <p:nvPr/>
         </p:nvSpPr>
@@ -6129,7 +6195,7 @@
       </p:sp>
       <p:sp>
         <p:nvSpPr>
-          <p:cNvPr id="167" name="Shape 165"/>
+          <p:cNvPr id="169" name="Shape 167"/>
           <p:cNvSpPr/>
           <p:nvPr/>
         </p:nvSpPr>
@@ -6151,7 +6217,7 @@
       </p:sp>
       <p:sp>
         <p:nvSpPr>
-          <p:cNvPr id="168" name="Shape 166"/>
+          <p:cNvPr id="170" name="Shape 168"/>
           <p:cNvSpPr/>
           <p:nvPr/>
         </p:nvSpPr>
@@ -6171,7 +6237,7 @@
       </p:sp>
       <p:sp>
         <p:nvSpPr>
-          <p:cNvPr id="169" name="Text 167"/>
+          <p:cNvPr id="171" name="Text 169"/>
           <p:cNvSpPr/>
           <p:nvPr/>
         </p:nvSpPr>
@@ -6210,7 +6276,7 @@
       </p:sp>
       <p:sp>
         <p:nvSpPr>
-          <p:cNvPr id="170" name="Shape 168"/>
+          <p:cNvPr id="172" name="Shape 170"/>
           <p:cNvSpPr/>
           <p:nvPr/>
         </p:nvSpPr>
@@ -6237,7 +6303,7 @@
       </p:sp>
       <p:sp>
         <p:nvSpPr>
-          <p:cNvPr id="171" name="Text 169"/>
+          <p:cNvPr id="173" name="Text 171"/>
           <p:cNvSpPr/>
           <p:nvPr/>
         </p:nvSpPr>
@@ -6276,7 +6342,7 @@
       </p:sp>
       <p:sp>
         <p:nvSpPr>
-          <p:cNvPr id="172" name="Shape 170"/>
+          <p:cNvPr id="174" name="Shape 172"/>
           <p:cNvSpPr/>
           <p:nvPr/>
         </p:nvSpPr>
@@ -6303,7 +6369,7 @@
       </p:sp>
       <p:sp>
         <p:nvSpPr>
-          <p:cNvPr id="173" name="Text 171"/>
+          <p:cNvPr id="175" name="Text 173"/>
           <p:cNvSpPr/>
           <p:nvPr/>
         </p:nvSpPr>
@@ -6342,7 +6408,7 @@
       </p:sp>
       <p:sp>
         <p:nvSpPr>
-          <p:cNvPr id="174" name="Shape 172"/>
+          <p:cNvPr id="176" name="Shape 174"/>
           <p:cNvSpPr/>
           <p:nvPr/>
         </p:nvSpPr>
@@ -6369,7 +6435,7 @@
       </p:sp>
       <p:sp>
         <p:nvSpPr>
-          <p:cNvPr id="175" name="Text 173"/>
+          <p:cNvPr id="177" name="Text 175"/>
           <p:cNvSpPr/>
           <p:nvPr/>
         </p:nvSpPr>
@@ -6408,7 +6474,7 @@
       </p:sp>
       <p:sp>
         <p:nvSpPr>
-          <p:cNvPr id="176" name="Shape 174"/>
+          <p:cNvPr id="178" name="Shape 176"/>
           <p:cNvSpPr/>
           <p:nvPr/>
         </p:nvSpPr>
@@ -6435,7 +6501,7 @@
       </p:sp>
       <p:sp>
         <p:nvSpPr>
-          <p:cNvPr id="177" name="Text 175"/>
+          <p:cNvPr id="179" name="Text 177"/>
           <p:cNvSpPr/>
           <p:nvPr/>
         </p:nvSpPr>
@@ -6474,7 +6540,7 @@
       </p:sp>
       <p:sp>
         <p:nvSpPr>
-          <p:cNvPr id="178" name="Shape 176"/>
+          <p:cNvPr id="180" name="Shape 178"/>
           <p:cNvSpPr/>
           <p:nvPr/>
         </p:nvSpPr>
@@ -6501,7 +6567,7 @@
       </p:sp>
       <p:sp>
         <p:nvSpPr>
-          <p:cNvPr id="179" name="Text 177"/>
+          <p:cNvPr id="181" name="Text 179"/>
           <p:cNvSpPr/>
           <p:nvPr/>
         </p:nvSpPr>
@@ -6532,15 +6598,15 @@
                 <a:ea typeface="Arial" pitchFamily="34" charset="-122"/>
                 <a:cs typeface="Arial" pitchFamily="34" charset="-120"/>
               </a:rPr>
-              <a:t>098</a:t>
-            </a:r>
-            <a:endParaRPr lang="en-US" sz="1900" dirty="0"/>
-          </a:p>
-        </p:txBody>
-      </p:sp>
-      <p:sp>
-        <p:nvSpPr>
-          <p:cNvPr id="180" name="Shape 178"/>
+              <a:t>990</a:t>
+            </a:r>
+            <a:endParaRPr lang="en-US" sz="1900" dirty="0"/>
+          </a:p>
+        </p:txBody>
+      </p:sp>
+      <p:sp>
+        <p:nvSpPr>
+          <p:cNvPr id="182" name="Shape 180"/>
           <p:cNvSpPr/>
           <p:nvPr/>
         </p:nvSpPr>
@@ -6567,7 +6633,7 @@
       </p:sp>
       <p:sp>
         <p:nvSpPr>
-          <p:cNvPr id="181" name="Text 179"/>
+          <p:cNvPr id="183" name="Text 181"/>
           <p:cNvSpPr/>
           <p:nvPr/>
         </p:nvSpPr>
@@ -6598,15 +6664,15 @@
                 <a:ea typeface="Arial" pitchFamily="34" charset="-122"/>
                 <a:cs typeface="Arial" pitchFamily="34" charset="-120"/>
               </a:rPr>
-              <a:t>990</a:t>
-            </a:r>
-            <a:endParaRPr lang="en-US" sz="1900" dirty="0"/>
-          </a:p>
-        </p:txBody>
-      </p:sp>
-      <p:sp>
-        <p:nvSpPr>
-          <p:cNvPr id="182" name="Shape 180"/>
+              <a:t>072</a:t>
+            </a:r>
+            <a:endParaRPr lang="en-US" sz="1900" dirty="0"/>
+          </a:p>
+        </p:txBody>
+      </p:sp>
+      <p:sp>
+        <p:nvSpPr>
+          <p:cNvPr id="184" name="Shape 182"/>
           <p:cNvSpPr/>
           <p:nvPr/>
         </p:nvSpPr>
@@ -6633,7 +6699,7 @@
       </p:sp>
       <p:sp>
         <p:nvSpPr>
-          <p:cNvPr id="183" name="Text 181"/>
+          <p:cNvPr id="185" name="Text 183"/>
           <p:cNvSpPr/>
           <p:nvPr/>
         </p:nvSpPr>
@@ -6664,15 +6730,15 @@
                 <a:ea typeface="Arial" pitchFamily="34" charset="-122"/>
                 <a:cs typeface="Arial" pitchFamily="34" charset="-120"/>
               </a:rPr>
-              <a:t>072</a:t>
-            </a:r>
-            <a:endParaRPr lang="en-US" sz="1900" dirty="0"/>
-          </a:p>
-        </p:txBody>
-      </p:sp>
-      <p:sp>
-        <p:nvSpPr>
-          <p:cNvPr id="184" name="Shape 182"/>
+              <a:t>250</a:t>
+            </a:r>
+            <a:endParaRPr lang="en-US" sz="1900" dirty="0"/>
+          </a:p>
+        </p:txBody>
+      </p:sp>
+      <p:sp>
+        <p:nvSpPr>
+          <p:cNvPr id="186" name="Shape 184"/>
           <p:cNvSpPr/>
           <p:nvPr/>
         </p:nvSpPr>
@@ -6699,79 +6765,13 @@
       </p:sp>
       <p:sp>
         <p:nvSpPr>
-          <p:cNvPr id="185" name="Text 183"/>
+          <p:cNvPr id="187" name="Text 185"/>
           <p:cNvSpPr/>
           <p:nvPr/>
         </p:nvSpPr>
         <p:spPr>
           <a:xfrm>
             <a:off x="10773664" y="5640832"/>
-            <a:ext cx="1086104" cy="489712"/>
-          </a:xfrm>
-          <a:prstGeom prst="rect">
-            <a:avLst/>
-          </a:prstGeom>
-          <a:noFill/>
-          <a:ln/>
-        </p:spPr>
-        <p:txBody>
-          <a:bodyPr wrap="square" lIns="0" tIns="0" rIns="0" bIns="0" rtlCol="0" anchor="ctr"/>
-          <a:lstStyle/>
-          <a:p>
-            <a:pPr algn="ctr" indent="0" marL="0">
-              <a:buNone/>
-            </a:pPr>
-            <a:r>
-              <a:rPr lang="en-US" sz="1900" b="1" dirty="0">
-                <a:solidFill>
-                  <a:srgbClr val="005587"/>
-                </a:solidFill>
-                <a:latin typeface="Arial" pitchFamily="34" charset="0"/>
-                <a:ea typeface="Arial" pitchFamily="34" charset="-122"/>
-                <a:cs typeface="Arial" pitchFamily="34" charset="-120"/>
-              </a:rPr>
-              <a:t>250</a:t>
-            </a:r>
-            <a:endParaRPr lang="en-US" sz="1900" dirty="0"/>
-          </a:p>
-        </p:txBody>
-      </p:sp>
-      <p:sp>
-        <p:nvSpPr>
-          <p:cNvPr id="186" name="Shape 184"/>
-          <p:cNvSpPr/>
-          <p:nvPr/>
-        </p:nvSpPr>
-        <p:spPr>
-          <a:xfrm>
-            <a:off x="10773664" y="6185408"/>
-            <a:ext cx="1086104" cy="489712"/>
-          </a:xfrm>
-          <a:prstGeom prst="roundRect">
-            <a:avLst>
-              <a:gd name="adj" fmla="val 7469"/>
-            </a:avLst>
-          </a:prstGeom>
-          <a:solidFill>
-            <a:srgbClr val="FFFFFF"/>
-          </a:solidFill>
-          <a:ln w="15875">
-            <a:solidFill>
-              <a:srgbClr val="F15A24"/>
-            </a:solidFill>
-            <a:prstDash val="solid"/>
-          </a:ln>
-        </p:spPr>
-      </p:sp>
-      <p:sp>
-        <p:nvSpPr>
-          <p:cNvPr id="187" name="Text 185"/>
-          <p:cNvSpPr/>
-          <p:nvPr/>
-        </p:nvSpPr>
-        <p:spPr>
-          <a:xfrm>
-            <a:off x="10773664" y="6185408"/>
             <a:ext cx="1086104" cy="489712"/>
           </a:xfrm>
           <a:prstGeom prst="rect">
